--- a/workspace/clients/brisken/deliverables/lead-generation/rome-2026/decks/brisken-market-data-hub.pptx
+++ b/workspace/clients/brisken/deliverables/lead-generation/rome-2026/decks/brisken-market-data-hub.pptx
@@ -127,7 +127,7 @@
 <file path=ppt/revisionInfo.xml><?xml version="1.0" encoding="utf-8"?>
 <p1510:revInfo xmlns:a="http://schemas.openxmlformats.org/drawingml/2006/main" xmlns:r="http://schemas.openxmlformats.org/officeDocument/2006/relationships" xmlns:p1510="http://schemas.microsoft.com/office/powerpoint/2015/10/main">
   <p1510:revLst>
-    <p1510:client id="{E3635D36-BAB7-8C4E-8C39-B17451E32DD3}" v="2" dt="2026-07-09T11:46:46.949"/>
+    <p1510:client id="{E3635D36-BAB7-8C4E-8C39-B17451E32DD3}" v="3" dt="2026-07-09T23:10:47.592"/>
   </p1510:revLst>
 </p1510:revInfo>
 </file>
@@ -13624,16 +13624,12 @@
 </file>
 
 <file path=customXml/item1.xml><?xml version="1.0" encoding="utf-8"?>
-<p:properties xmlns:p="http://schemas.microsoft.com/office/2006/metadata/properties" xmlns:xsi="http://www.w3.org/2001/XMLSchema-instance" xmlns:pc="http://schemas.microsoft.com/office/infopath/2007/PartnerControls">
-  <documentManagement>
-    <_ip_UnifiedCompliancePolicyUIAction xmlns="http://schemas.microsoft.com/sharepoint/v3" xsi:nil="true"/>
-    <lcf76f155ced4ddcb4097134ff3c332f xmlns="f7c12939-211d-4aac-95d7-b8d38b675650">
-      <Terms xmlns="http://schemas.microsoft.com/office/infopath/2007/PartnerControls"/>
-    </lcf76f155ced4ddcb4097134ff3c332f>
-    <_ip_UnifiedCompliancePolicyProperties xmlns="http://schemas.microsoft.com/sharepoint/v3" xsi:nil="true"/>
-    <TaxCatchAll xmlns="e9089a15-9498-4149-a6f3-b4bc8e4d21ac" xsi:nil="true"/>
-  </documentManagement>
-</p:properties>
+<?mso-contentType ?>
+<FormTemplates xmlns="http://schemas.microsoft.com/sharepoint/v3/contenttype/forms">
+  <Display>DocumentLibraryForm</Display>
+  <Edit>DocumentLibraryForm</Edit>
+  <New>DocumentLibraryForm</New>
+</FormTemplates>
 </file>
 
 <file path=customXml/item2.xml><?xml version="1.0" encoding="utf-8"?>
@@ -13909,28 +13905,22 @@
 </file>
 
 <file path=customXml/item3.xml><?xml version="1.0" encoding="utf-8"?>
-<?mso-contentType ?>
-<FormTemplates xmlns="http://schemas.microsoft.com/sharepoint/v3/contenttype/forms">
-  <Display>DocumentLibraryForm</Display>
-  <Edit>DocumentLibraryForm</Edit>
-  <New>DocumentLibraryForm</New>
-</FormTemplates>
+<p:properties xmlns:p="http://schemas.microsoft.com/office/2006/metadata/properties" xmlns:xsi="http://www.w3.org/2001/XMLSchema-instance" xmlns:pc="http://schemas.microsoft.com/office/infopath/2007/PartnerControls">
+  <documentManagement>
+    <_ip_UnifiedCompliancePolicyUIAction xmlns="http://schemas.microsoft.com/sharepoint/v3" xsi:nil="true"/>
+    <lcf76f155ced4ddcb4097134ff3c332f xmlns="f7c12939-211d-4aac-95d7-b8d38b675650">
+      <Terms xmlns="http://schemas.microsoft.com/office/infopath/2007/PartnerControls"/>
+    </lcf76f155ced4ddcb4097134ff3c332f>
+    <_ip_UnifiedCompliancePolicyProperties xmlns="http://schemas.microsoft.com/sharepoint/v3" xsi:nil="true"/>
+    <TaxCatchAll xmlns="e9089a15-9498-4149-a6f3-b4bc8e4d21ac" xsi:nil="true"/>
+  </documentManagement>
+</p:properties>
 </file>
 
 <file path=customXml/itemProps1.xml><?xml version="1.0" encoding="utf-8"?>
-<ds:datastoreItem xmlns:ds="http://schemas.openxmlformats.org/officeDocument/2006/customXml" ds:itemID="{1C2F736D-DC26-40F4-9F5A-C48CF08FE95D}">
+<ds:datastoreItem xmlns:ds="http://schemas.openxmlformats.org/officeDocument/2006/customXml" ds:itemID="{2FF6C671-B130-4763-AD83-B0443DD21A33}">
   <ds:schemaRefs>
-    <ds:schemaRef ds:uri="http://schemas.microsoft.com/sharepoint/v3"/>
-    <ds:schemaRef ds:uri="http://www.w3.org/XML/1998/namespace"/>
-    <ds:schemaRef ds:uri="http://schemas.microsoft.com/office/2006/metadata/properties"/>
-    <ds:schemaRef ds:uri="http://purl.org/dc/terms/"/>
-    <ds:schemaRef ds:uri="http://schemas.microsoft.com/office/infopath/2007/PartnerControls"/>
-    <ds:schemaRef ds:uri="e9089a15-9498-4149-a6f3-b4bc8e4d21ac"/>
-    <ds:schemaRef ds:uri="http://purl.org/dc/elements/1.1/"/>
-    <ds:schemaRef ds:uri="http://schemas.microsoft.com/office/2006/documentManagement/types"/>
-    <ds:schemaRef ds:uri="http://schemas.openxmlformats.org/package/2006/metadata/core-properties"/>
-    <ds:schemaRef ds:uri="f7c12939-211d-4aac-95d7-b8d38b675650"/>
-    <ds:schemaRef ds:uri="http://purl.org/dc/dcmitype/"/>
+    <ds:schemaRef ds:uri="http://schemas.microsoft.com/sharepoint/v3/contenttype/forms"/>
   </ds:schemaRefs>
 </ds:datastoreItem>
 </file>
@@ -13956,9 +13946,19 @@
 </file>
 
 <file path=customXml/itemProps3.xml><?xml version="1.0" encoding="utf-8"?>
-<ds:datastoreItem xmlns:ds="http://schemas.openxmlformats.org/officeDocument/2006/customXml" ds:itemID="{2FF6C671-B130-4763-AD83-B0443DD21A33}">
+<ds:datastoreItem xmlns:ds="http://schemas.openxmlformats.org/officeDocument/2006/customXml" ds:itemID="{1C2F736D-DC26-40F4-9F5A-C48CF08FE95D}">
   <ds:schemaRefs>
-    <ds:schemaRef ds:uri="http://schemas.microsoft.com/sharepoint/v3/contenttype/forms"/>
+    <ds:schemaRef ds:uri="http://purl.org/dc/terms/"/>
+    <ds:schemaRef ds:uri="http://www.w3.org/XML/1998/namespace"/>
+    <ds:schemaRef ds:uri="e9089a15-9498-4149-a6f3-b4bc8e4d21ac"/>
+    <ds:schemaRef ds:uri="http://schemas.microsoft.com/office/infopath/2007/PartnerControls"/>
+    <ds:schemaRef ds:uri="http://schemas.microsoft.com/office/2006/documentManagement/types"/>
+    <ds:schemaRef ds:uri="f7c12939-211d-4aac-95d7-b8d38b675650"/>
+    <ds:schemaRef ds:uri="http://purl.org/dc/elements/1.1/"/>
+    <ds:schemaRef ds:uri="http://schemas.microsoft.com/sharepoint/v3"/>
+    <ds:schemaRef ds:uri="http://schemas.openxmlformats.org/package/2006/metadata/core-properties"/>
+    <ds:schemaRef ds:uri="http://schemas.microsoft.com/office/2006/metadata/properties"/>
+    <ds:schemaRef ds:uri="http://purl.org/dc/dcmitype/"/>
   </ds:schemaRefs>
 </ds:datastoreItem>
 </file>
